--- a/management-seminars/week13_words_of_wisdom.pptx
+++ b/management-seminars/week13_words_of_wisdom.pptx
@@ -505,7 +505,7 @@
           <a:lstStyle/>
           <a:p>
             <a:r>
-              <a:t>Management seminar for week 13: Analytics Words of Wisdom. We will go through ideas from widely followed analytics voices on LinkedIn, grouped into four themes. Encourage students to follow a few of these people and add their own favorites. Provide opening remarks here.</a:t>
+              <a:t>Management seminar for week 13: Analytics Words of Wisdom. We will go through four pieces of advice that come up again and again among experienced analytics practitioners. Ask students which one they found hardest to follow this term. Provide opening remarks here.</a:t>
             </a:r>
           </a:p>
         </p:txBody>
@@ -575,7 +575,7 @@
           <a:lstStyle/>
           <a:p>
             <a:r>
-              <a:t>Cassie Kozyrkov, Google's first chief decision scientist, built a large LinkedIn following around decision intelligence: frame the decision and your default action before looking at data, and know whether you are exploring for inspiration or testing to decide. Bernard Marr, a widely read author on data strategy, makes a similar point: start from the organization's key business questions, not from the data you happen to have. Paraphrased from their public writing and talks.</a:t>
+              <a:t>Projects that begin with "let's see what the data says" tend to wander. Projects that begin with "should we expand this program?" know what to measure and when to stop. Before running anything, ask what the organization will do if the answer is yes, if it is no, and if it is unclear. A simple count or rate answers many business questions better than a complex model.</a:t>
             </a:r>
           </a:p>
         </p:txBody>
@@ -645,7 +645,7 @@
           <a:lstStyle/>
           <a:p>
             <a:r>
-              <a:t>Brent Dykes, author of Effective Data Storytelling, argues that data, narrative and visuals each fail alone and persuade together, and that dashboards are exploratory tools rather than stories. Cole Nussbaumer Knaflic (Storytelling with Data) teaches removing clutter and focusing attention on the one point that matters. Both stress tailoring the story to the audience's goals. Paraphrased from their public writing and talks.</a:t>
+              <a:t>Good analysis that is never acted on has no value to the organization. Leaders are busy and switch between many topics; the analyst's job is to make the meaning and the next step easy to see. Tailor depth to the audience, put the conclusion first, and end with a specific recommendation.</a:t>
             </a:r>
           </a:p>
         </p:txBody>
@@ -715,7 +715,7 @@
           <a:lstStyle/>
           <a:p>
             <a:r>
-              <a:t>Chad Sanderson popularized data contracts on LinkedIn: agreements between the teams that produce data and the teams that use it, so quality is checked at the source ("shifting left"). Andrew Ng, co-founder of Coursera and DeepLearning.AI, champions data-centric AI: improving data quality often helps more than tuning the model. In healthcare, that means working with billing, registration and EHR teams, not just cleaning data downstream. Paraphrased from their public writing and talks.</a:t>
+              <a:t>In healthcare, many analytics problems trace back to registration, coding, billing and EHR workflows. Cleaning the same issue downstream every month is slower than fixing it at the source, so build relationships with those teams and agree on definitions. Improving input data usually helps more than switching to a more sophisticated model. Stakeholders trust numbers that are reliable month after month.</a:t>
             </a:r>
           </a:p>
         </p:txBody>
@@ -785,7 +785,7 @@
           <a:lstStyle/>
           <a:p>
             <a:r>
-              <a:t>Popular analytics educators on LinkedIn, including Alex Freberg (Alex the Analyst), Luke Barousse and Avery Smith, consistently emphasize mastering fundamentals like SQL and Excel, building portfolio projects on real questions, and sharing work publicly to learn faster. Their audiences are mostly career builders, and the advice holds at every career stage. Paraphrased from their public content.</a:t>
+              <a:t>New tools appear every year, including AI assistants, but most day-to-day analytics still runs on querying, joining, summarizing and explaining data. Practicing on real questions builds judgment that tutorials don't. Sharing work, inside the organization or publicly, invites feedback and speeds learning. The habit of asking why a number looks the way it does outlasts any specific tool.</a:t>
             </a:r>
           </a:p>
         </p:txBody>
@@ -1631,7 +1631,7 @@
                   <a:srgbClr val="FFFFFF"/>
                 </a:solidFill>
               </a:rPr>
-              <a:t>Decide what evidence would change your mind first</a:t>
+              <a:t>Know what result would change the plan</a:t>
             </a:r>
             <a:endParaRPr lang="en-US" sz="2400" dirty="0"/>
           </a:p>
@@ -1649,7 +1649,7 @@
                   <a:srgbClr val="FFFFFF"/>
                 </a:solidFill>
               </a:rPr>
-              <a:t>Data without a question is exploration, not an answer</a:t>
+              <a:t>Exploring data is fine; just call it exploring</a:t>
             </a:r>
             <a:endParaRPr lang="en-US" sz="2400" dirty="0"/>
           </a:p>
@@ -1810,7 +1810,7 @@
                   <a:srgbClr val="FFFFFF"/>
                 </a:solidFill>
               </a:rPr>
-              <a:t>Combine data, narrative and visuals</a:t>
+              <a:t>Know your audience and what they care about</a:t>
             </a:r>
             <a:endParaRPr lang="en-US" sz="2400" dirty="0"/>
           </a:p>
@@ -1828,7 +1828,7 @@
                   <a:srgbClr val="FFFFFF"/>
                 </a:solidFill>
               </a:rPr>
-              <a:t>Know your audience and what they care about</a:t>
+              <a:t>Lead with the "so what"</a:t>
             </a:r>
             <a:endParaRPr lang="en-US" sz="2400" dirty="0"/>
           </a:p>
@@ -1846,7 +1846,7 @@
                   <a:srgbClr val="FFFFFF"/>
                 </a:solidFill>
               </a:rPr>
-              <a:t>Dashboards explore; stories explain</a:t>
+              <a:t>One clear message beats ten charts</a:t>
             </a:r>
             <a:endParaRPr lang="en-US" sz="2400" dirty="0"/>
           </a:p>
@@ -1864,7 +1864,7 @@
                   <a:srgbClr val="FFFFFF"/>
                 </a:solidFill>
               </a:rPr>
-              <a:t>Lead with the "so what"</a:t>
+              <a:t>Make the next step obvious</a:t>
             </a:r>
             <a:endParaRPr lang="en-US" sz="2400" dirty="0"/>
           </a:p>
@@ -2007,7 +2007,7 @@
                   <a:srgbClr val="FFFFFF"/>
                 </a:solidFill>
               </a:rPr>
-              <a:t>Most data problems start where data is produced</a:t>
+              <a:t>Most data problems start where data is created</a:t>
             </a:r>
             <a:endParaRPr lang="en-US" sz="2400" dirty="0"/>
           </a:p>
@@ -2025,7 +2025,7 @@
                   <a:srgbClr val="FFFFFF"/>
                 </a:solidFill>
               </a:rPr>
-              <a:t>Agree on definitions with the teams that create data</a:t>
+              <a:t>Work with the teams that produce the data</a:t>
             </a:r>
             <a:endParaRPr lang="en-US" sz="2400" dirty="0"/>
           </a:p>
@@ -2240,7 +2240,7 @@
                   <a:srgbClr val="FFFFFF"/>
                 </a:solidFill>
               </a:rPr>
-              <a:t>Share your work and learn in public</a:t>
+              <a:t>Share your work and ask for feedback</a:t>
             </a:r>
             <a:endParaRPr lang="en-US" sz="2400" dirty="0"/>
           </a:p>

--- a/management-seminars/week13_words_of_wisdom.pptx
+++ b/management-seminars/week13_words_of_wisdom.pptx
@@ -10,6 +10,7 @@
     <p:sldId id="268" r:id="rId19"/>
     <p:sldId id="269" r:id="rId20"/>
     <p:sldId id="270" r:id="rId21"/>
+    <p:sldId id="271" r:id="rId11"/>
   </p:sldIdLst>
   <p:notesMasterIdLst>
     <p:notesMasterId r:id="rId12"/>
@@ -786,6 +787,76 @@
           <a:p>
             <a:r>
               <a:t>New tools appear every year, including AI assistants, but most day-to-day analytics still runs on querying, joining, summarizing and explaining data. Practicing on real questions builds judgment that tutorials don't. Sharing work, inside the organization or publicly, invites feedback and speeds learning. The habit of asking why a number looks the way it does outlasts any specific tool.</a:t>
+            </a:r>
+          </a:p>
+        </p:txBody>
+      </p:sp>
+      <p:sp>
+        <p:nvSpPr>
+          <p:cNvPr id="4" name="Slide Number Placeholder 3"/>
+          <p:cNvSpPr>
+            <a:spLocks noGrp="1"/>
+          </p:cNvSpPr>
+          <p:nvPr>
+            <p:ph type="sldNum" idx="5" sz="quarter"/>
+          </p:nvPr>
+        </p:nvSpPr>
+        <p:spPr/>
+      </p:sp>
+    </p:spTree>
+  </p:cSld>
+  <p:clrMapOvr>
+    <a:masterClrMapping/>
+  </p:clrMapOvr>
+</p:notes>
+</file>
+
+<file path=ppt/notesSlides/notesSlide6.xml><?xml version="1.0" encoding="utf-8"?>
+<p:notes xmlns:a="http://schemas.openxmlformats.org/drawingml/2006/main" xmlns:p="http://schemas.openxmlformats.org/presentationml/2006/main" xmlns:r="http://schemas.openxmlformats.org/officeDocument/2006/relationships">
+  <p:cSld>
+    <p:spTree>
+      <p:nvGrpSpPr>
+        <p:cNvPr id="1" name=""/>
+        <p:cNvGrpSpPr/>
+        <p:nvPr/>
+      </p:nvGrpSpPr>
+      <p:grpSpPr>
+        <a:xfrm>
+          <a:off x="0" y="0"/>
+          <a:ext cx="0" cy="0"/>
+          <a:chOff x="0" y="0"/>
+          <a:chExt cx="0" cy="0"/>
+        </a:xfrm>
+      </p:grpSpPr>
+      <p:sp>
+        <p:nvSpPr>
+          <p:cNvPr id="2" name="Slide Image Placeholder 1"/>
+          <p:cNvSpPr>
+            <a:spLocks noGrp="1"/>
+          </p:cNvSpPr>
+          <p:nvPr>
+            <p:ph type="sldImg" idx="2"/>
+          </p:nvPr>
+        </p:nvSpPr>
+        <p:spPr/>
+      </p:sp>
+      <p:sp>
+        <p:nvSpPr>
+          <p:cNvPr id="3" name="Notes Placeholder 2"/>
+          <p:cNvSpPr>
+            <a:spLocks noGrp="1"/>
+          </p:cNvSpPr>
+          <p:nvPr>
+            <p:ph type="body" idx="3" sz="quarter"/>
+          </p:nvPr>
+        </p:nvSpPr>
+        <p:spPr/>
+        <p:txBody>
+          <a:bodyPr/>
+          <a:lstStyle/>
+          <a:p>
+            <a:r>
+              <a:t>Give students a few minutes to write an answer drawn from their own experience and career, then ask two or three to share. Connect their examples back to this seminar's content. In an online section, post the same question to the discussion board.</a:t>
             </a:r>
           </a:p>
         </p:txBody>
@@ -1435,7 +1506,7 @@
 </p:sldMaster>
 </file>
 
-<file path=ppt/slides/slide11.xml><?xml version="1.0" encoding="utf-8"?>
+<file path=ppt/slides/slide1.xml><?xml version="1.0" encoding="utf-8"?>
 <p:sld xmlns:a="http://schemas.openxmlformats.org/drawingml/2006/main" xmlns:p="http://schemas.openxmlformats.org/presentationml/2006/main" xmlns:r="http://schemas.openxmlformats.org/officeDocument/2006/relationships">
   <p:cSld>
     <p:spTree>
@@ -1529,7 +1600,7 @@
 </p:sld>
 </file>
 
-<file path=ppt/slides/slide12.xml><?xml version="1.0" encoding="utf-8"?>
+<file path=ppt/slides/slide2.xml><?xml version="1.0" encoding="utf-8"?>
 <p:sld xmlns:a="http://schemas.openxmlformats.org/drawingml/2006/main" xmlns:p="http://schemas.openxmlformats.org/presentationml/2006/main" xmlns:r="http://schemas.openxmlformats.org/officeDocument/2006/relationships">
   <p:cSld>
     <p:spTree>
@@ -1726,7 +1797,7 @@
 </p:sld>
 </file>
 
-<file path=ppt/slides/slide13.xml><?xml version="1.0" encoding="utf-8"?>
+<file path=ppt/slides/slide3.xml><?xml version="1.0" encoding="utf-8"?>
 <p:sld xmlns:a="http://schemas.openxmlformats.org/drawingml/2006/main" xmlns:p="http://schemas.openxmlformats.org/presentationml/2006/main" xmlns:r="http://schemas.openxmlformats.org/officeDocument/2006/relationships">
   <p:cSld>
     <p:spTree>
@@ -1923,7 +1994,7 @@
 </p:sld>
 </file>
 
-<file path=ppt/slides/slide14.xml><?xml version="1.0" encoding="utf-8"?>
+<file path=ppt/slides/slide4.xml><?xml version="1.0" encoding="utf-8"?>
 <p:sld xmlns:a="http://schemas.openxmlformats.org/drawingml/2006/main" xmlns:p="http://schemas.openxmlformats.org/presentationml/2006/main" xmlns:r="http://schemas.openxmlformats.org/officeDocument/2006/relationships">
   <p:cSld>
     <p:spTree>
@@ -2120,7 +2191,7 @@
 </p:sld>
 </file>
 
-<file path=ppt/slides/slide15.xml><?xml version="1.0" encoding="utf-8"?>
+<file path=ppt/slides/slide5.xml><?xml version="1.0" encoding="utf-8"?>
 <p:sld xmlns:a="http://schemas.openxmlformats.org/drawingml/2006/main" xmlns:p="http://schemas.openxmlformats.org/presentationml/2006/main" xmlns:r="http://schemas.openxmlformats.org/officeDocument/2006/relationships">
   <p:cSld>
     <p:spTree>
@@ -2304,6 +2375,167 @@
             <a:fld id="{F7021451-1387-4CA6-816F-3879F97B5CBC}" type="slidenum">
               <a:rPr b="0" lang="en-US"/>
               <a:t>5</a:t>
+            </a:fld>
+            <a:endParaRPr lang="en-US"/>
+          </a:p>
+        </p:txBody>
+      </p:sp>
+    </p:spTree>
+  </p:cSld>
+  <p:clrMapOvr>
+    <a:masterClrMapping/>
+  </p:clrMapOvr>
+</p:sld>
+</file>
+
+<file path=ppt/slides/slide6.xml><?xml version="1.0" encoding="utf-8"?>
+<p:sld xmlns:a="http://schemas.openxmlformats.org/drawingml/2006/main" xmlns:p="http://schemas.openxmlformats.org/presentationml/2006/main" xmlns:r="http://schemas.openxmlformats.org/officeDocument/2006/relationships">
+  <p:cSld>
+    <p:spTree>
+      <p:nvGrpSpPr>
+        <p:cNvPr id="1" name=""/>
+        <p:cNvGrpSpPr/>
+        <p:nvPr/>
+      </p:nvGrpSpPr>
+      <p:grpSpPr/>
+      <p:sp>
+        <p:nvSpPr>
+          <p:cNvPr id="2" name="Text 0"/>
+          <p:cNvSpPr/>
+          <p:nvPr>
+            <p:ph idx="100" type="title" hasCustomPrompt="1"/>
+          </p:nvPr>
+        </p:nvSpPr>
+        <p:spPr>
+          <a:xfrm>
+            <a:off x="731520" y="457200"/>
+            <a:ext cx="10698480" cy="822960"/>
+          </a:xfrm>
+          <a:prstGeom prst="rect">
+            <a:avLst/>
+          </a:prstGeom>
+          <a:noFill/>
+          <a:ln/>
+        </p:spPr>
+        <p:txBody>
+          <a:bodyPr wrap="square" lIns="0" tIns="0" rIns="0" bIns="0" rtlCol="0" anchor="t"/>
+          <a:lstStyle/>
+          <a:p>
+            <a:pPr algn="l" indent="0" marL="0">
+              <a:buNone/>
+            </a:pPr>
+            <a:r>
+              <a:rPr lang="en-US" sz="3200" b="1" dirty="0">
+                <a:solidFill>
+                  <a:srgbClr val="FFFFFF"/>
+                </a:solidFill>
+              </a:rPr>
+              <a:t>Discussion</a:t>
+            </a:r>
+            <a:endParaRPr lang="en-US" sz="3200" dirty="0"/>
+          </a:p>
+        </p:txBody>
+      </p:sp>
+      <p:sp>
+        <p:nvSpPr>
+          <p:cNvPr id="3" name="Text 0"/>
+          <p:cNvSpPr/>
+          <p:nvPr>
+            <p:ph idx="101" type="body" hasCustomPrompt="1"/>
+          </p:nvPr>
+        </p:nvSpPr>
+        <p:spPr>
+          <a:xfrm>
+            <a:off x="731520" y="1554480"/>
+            <a:ext cx="10698480" cy="4754880"/>
+          </a:xfrm>
+          <a:prstGeom prst="rect">
+            <a:avLst/>
+          </a:prstGeom>
+          <a:noFill/>
+          <a:ln/>
+        </p:spPr>
+        <p:txBody>
+          <a:bodyPr wrap="square" rtlCol="0" anchor="t"/>
+          <a:lstStyle/>
+          <a:p>
+            <a:pPr algn="l" marL="342900" indent="-342900">
+              <a:spcAft>
+                <a:spcPts val="1000"/>
+              </a:spcAft>
+              <a:buSzPct val="100000"/>
+              <a:buChar char="•"/>
+            </a:pPr>
+            <a:r>
+              <a:rPr lang="en-US" sz="2400" dirty="0">
+                <a:solidFill>
+                  <a:srgbClr val="FFFFFF"/>
+                </a:solidFill>
+              </a:rPr>
+              <a:t>Which piece of advice from this course will you put into practice first, and on what project in your career?</a:t>
+            </a:r>
+            <a:endParaRPr lang="en-US" sz="2400" dirty="0"/>
+          </a:p>
+          <a:p>
+            <a:pPr algn="l" marL="342900" indent="-342900">
+              <a:spcAft>
+                <a:spcPts val="1000"/>
+              </a:spcAft>
+              <a:buSzPct val="100000"/>
+              <a:buChar char="•"/>
+            </a:pPr>
+            <a:r>
+              <a:rPr lang="en-US" sz="2400" dirty="0">
+                <a:solidFill>
+                  <a:srgbClr val="FFFFFF"/>
+                </a:solidFill>
+              </a:rPr>
+              <a:t>Draw on your own experience and career, and apply today's seminar to that setting.</a:t>
+            </a:r>
+            <a:endParaRPr lang="en-US" sz="2400" dirty="0"/>
+          </a:p>
+        </p:txBody>
+      </p:sp>
+      <p:sp>
+        <p:nvSpPr>
+          <p:cNvPr id="25" name="Slide Number Placeholder 0"/>
+          <p:cNvSpPr>
+            <a:spLocks noGrp="1"/>
+          </p:cNvSpPr>
+          <p:nvPr>
+            <p:ph type="sldNum" sz="quarter" idx="4294967295"/>
+          </p:nvPr>
+        </p:nvSpPr>
+        <p:spPr>
+          <a:xfrm>
+            <a:off x="10972800" y="6400800"/>
+            <a:ext cx="548640" cy="274320"/>
+          </a:xfrm>
+          <a:prstGeom prst="rect">
+            <a:avLst/>
+          </a:prstGeom>
+          <a:extLst>
+            <a:ext uri="{C572A759-6A51-4108-AA02-DFA0A04FC94B}">
+              <ma14:wrappingTextBoxFlag xmlns:ma14="http://schemas.microsoft.com/office/mac/drawingml/2011/main" val="0"/>
+            </a:ext>
+          </a:extLst>
+        </p:spPr>
+        <p:txBody>
+          <a:bodyPr/>
+          <a:lstStyle>
+            <a:lvl1pPr>
+              <a:defRPr sz="1000">
+                <a:solidFill>
+                  <a:srgbClr val="BFBFBF"/>
+                </a:solidFill>
+              </a:defRPr>
+            </a:lvl1pPr>
+          </a:lstStyle>
+          <a:p>
+            <a:pPr algn="r"/>
+            <a:fld id="{F7021451-1387-4CA6-816F-3879F97B5CBC}" type="slidenum">
+              <a:rPr b="0" lang="en-US"/>
+              <a:t>6</a:t>
             </a:fld>
             <a:endParaRPr lang="en-US"/>
           </a:p>

--- a/management-seminars/week13_words_of_wisdom.pptx
+++ b/management-seminars/week13_words_of_wisdom.pptx
@@ -1548,7 +1548,7 @@
                   <a:srgbClr val="FFFFFF"/>
                 </a:solidFill>
               </a:rPr>
-              <a:t>Analytics Words of Wisdom</a:t>
+              <a:t>Week 13: Analytics Words of Wisdom</a:t>
             </a:r>
             <a:endParaRPr lang="en-US" sz="4000" dirty="0"/>
           </a:p>
